--- a/docs/pitch-deck-draft-HeyPay.pptx
+++ b/docs/pitch-deck-draft-HeyPay.pptx
@@ -244,7 +244,7 @@
             </a:pPr>
             <a:r>
               <a:rPr lang="en-US" sz="2000"/>
-              <a:t>Project Lead: [NAME]</a:t>
+              <a:t>Built solo by Ronald Ajusan</a:t>
             </a:r>
           </a:p>
           <a:p>
@@ -253,7 +253,7 @@
             </a:pPr>
             <a:r>
               <a:rPr lang="en-US" sz="2000"/>
-              <a:t>Team: [PLACEHOLDER: team name]</a:t>
+              <a:t>Artisam Labs</a:t>
             </a:r>
           </a:p>
         </p:txBody>
@@ -1045,28 +1045,28 @@
             <a:pPr/>
             <a:r>
               <a:rPr lang="en-US" sz="2400"/>
-              <a:t>[PLACEHOLDER: name] — role</a:t>
-            </a:r>
-          </a:p>
-          <a:p>
-            <a:pPr/>
-            <a:r>
-              <a:rPr lang="en-US" sz="2400"/>
-              <a:t>[PLACEHOLDER: name] — role</a:t>
-            </a:r>
-          </a:p>
-          <a:p>
-            <a:pPr/>
-            <a:r>
-              <a:rPr lang="en-US" sz="2400"/>
-              <a:t>[PLACEHOLDER: name] — role</a:t>
-            </a:r>
-          </a:p>
-          <a:p>
-            <a:pPr/>
-            <a:r>
-              <a:rPr lang="en-US" sz="2400"/>
-              <a:t>Contact: [PLACEHOLDER: email / handle / project URL]</a:t>
+              <a:t>Ronald Ajusan — solo developer: full-stack, design, infrastructure</a:t>
+            </a:r>
+          </a:p>
+          <a:p>
+            <a:pPr/>
+            <a:r>
+              <a:rPr lang="en-US" sz="2400"/>
+              <a:t>Artisam Labs — artisam.xyz</a:t>
+            </a:r>
+          </a:p>
+          <a:p>
+            <a:pPr/>
+            <a:r>
+              <a:rPr lang="en-US" sz="2400"/>
+              <a:t>One person, end to end: payer, merchant, admin, settlement worker</a:t>
+            </a:r>
+          </a:p>
+          <a:p>
+            <a:pPr/>
+            <a:r>
+              <a:rPr lang="en-US" sz="2400"/>
+              <a:t>Contact: ronaldajusan0@gmail.com   ·   github.com/ronaldajusan0/HeyPay</a:t>
             </a:r>
           </a:p>
           <a:p>
